--- a/engine/oz_deck/assets/oz_template.pptx
+++ b/engine/oz_deck/assets/oz_template.pptx
@@ -3080,40 +3080,40 @@
   <a:themeElements>
     <a:clrScheme name="Office">
       <a:dk1>
-        <a:sysClr val="windowText" lastClr="000000"/>
+        <a:srgbClr val="191919"/>
       </a:dk1>
       <a:lt1>
-        <a:sysClr val="window" lastClr="FFFFFF"/>
+        <a:srgbClr val="FFFFFF"/>
       </a:lt1>
       <a:dk2>
-        <a:srgbClr val="1F497D"/>
+        <a:srgbClr val="191919"/>
       </a:dk2>
       <a:lt2>
-        <a:srgbClr val="EEECE1"/>
+        <a:srgbClr val="F3F2F2"/>
       </a:lt2>
       <a:accent1>
         <a:srgbClr val="EC4324"/>
       </a:accent1>
       <a:accent2>
-        <a:srgbClr val="346F53"/>
+        <a:srgbClr val="3E9356"/>
       </a:accent2>
       <a:accent3>
-        <a:srgbClr val="191919"/>
+        <a:srgbClr val="D3122A"/>
       </a:accent3>
       <a:accent4>
-        <a:srgbClr val="999999"/>
+        <a:srgbClr val="191919"/>
       </a:accent4>
       <a:accent5>
-        <a:srgbClr val="E7E7E7"/>
+        <a:srgbClr val="999999"/>
       </a:accent5>
       <a:accent6>
-        <a:srgbClr val="222222"/>
+        <a:srgbClr val="8F3D2E"/>
       </a:accent6>
       <a:hlink>
-        <a:srgbClr val="6EA8C0"/>
+        <a:srgbClr val="EC4324"/>
       </a:hlink>
       <a:folHlink>
-        <a:srgbClr val="800080"/>
+        <a:srgbClr val="8F3D2E"/>
       </a:folHlink>
     </a:clrScheme>
     <a:fontScheme name="Office">
